--- a/public/fun/pack/pptx/familypro/가족소개프리미엄_13_3대가족_오팔펄.pptx
+++ b/public/fun/pack/pptx/familypro/가족소개프리미엄_13_3대가족_오팔펄.pptx
@@ -113,12 +113,12 @@
   <p:extLst>
     <p:ext uri="{521415D9-36F7-43E2-AB2F-B90AF26B5E84}">
       <p14:sectionLst xmlns:p14="http://schemas.microsoft.com/office/powerpoint/2010/main">
-        <p14:section name="시작" id="{AFF56BDD-B7AB-4CB7-AFCC-C8A4231BABF5}">
+        <p14:section name="시작" id="{E9543D57-4E97-4E16-AC23-DC68AE8393A6}">
           <p14:sldIdLst>
             <p14:sldId id="256"/>
           </p14:sldIdLst>
         </p14:section>
-        <p14:section name="본문" id="{E06BA031-0179-4EDE-B8BC-CCDF218505F8}">
+        <p14:section name="본문" id="{F8685CFC-CC1B-4732-B106-3CFBC3C08F91}">
           <p14:sldIdLst>
             <p14:sldId id="257"/>
             <p14:sldId id="258"/>
@@ -127,7 +127,7 @@
             <p14:sldId id="261"/>
           </p14:sldIdLst>
         </p14:section>
-        <p14:section name="마무리" id="{4386F90B-BE4D-44C2-BDFA-5F02042F8830}">
+        <p14:section name="마무리" id="{81EDCF91-CDC0-4D7A-8D42-E3AB0EF01F6B}">
           <p14:sldIdLst>
             <p14:sldId id="262"/>
           </p14:sldIdLst>
@@ -1556,7 +1556,7 @@
             </a:lvl1pPr>
           </a:lstStyle>
           <a:p>
-            <a:fld id="{15D05F22-9364-4FBE-B741-0C720F5AA2CC}" type="slidenum">
+            <a:fld id="{E9582B01-7301-4C6D-93AB-E082241BCB2B}" type="slidenum">
               <a:rPr lang="en-US"/>
               <a:t>‹#›</a:t>
             </a:fld>
@@ -2344,7 +2344,7 @@
             </a:lvl1pPr>
           </a:lstStyle>
           <a:p>
-            <a:fld id="{3FB6FA0E-B2DD-4EFC-8DB4-8FC280527A0B}" type="slidenum">
+            <a:fld id="{9CF55B9A-A975-4FE7-B08F-8252C6C5B97E}" type="slidenum">
               <a:rPr lang="en-US"/>
               <a:t>‹#›</a:t>
             </a:fld>
@@ -3097,7 +3097,7 @@
             </a:lvl1pPr>
           </a:lstStyle>
           <a:p>
-            <a:fld id="{7B4F3800-6B8A-4F27-B7FC-319B606E1C66}" type="slidenum">
+            <a:fld id="{ABA7499A-0052-4555-9F60-346636E8BF1A}" type="slidenum">
               <a:rPr lang="en-US"/>
               <a:t>‹#›</a:t>
             </a:fld>
@@ -4023,7 +4023,7 @@
           <a:p>
             <a:r>
               <a:rPr lang="ko-KR"/>
-              <a:t>도시락 싸 들고 오월 숲길로</a:t>
+              <a:t>도시락 싸 들고 연둣빛 숲길로</a:t>
             </a:r>
           </a:p>
         </p:txBody>
@@ -4045,7 +4045,7 @@
           <a:p>
             <a:r>
               <a:rPr lang="ko-KR"/>
-              <a:t>3대 가족 · 0000. 00. 00</a:t>
+              <a:t>3대 가족 · 날짜 입력</a:t>
             </a:r>
           </a:p>
         </p:txBody>
@@ -4544,7 +4544,7 @@
           <a:bodyPr/>
           <a:lstStyle/>
           <a:p>
-            <a:fld id="{1F515711-06E3-4671-891D-C8B990D898F0}" type="slidenum">
+            <a:fld id="{05C85560-5591-423D-BD5C-174D3E417F2E}" type="slidenum">
               <a:rPr lang="en-US"/>
               <a:t>‹#›</a:t>
             </a:fld>
@@ -5724,7 +5724,7 @@
           <a:bodyPr/>
           <a:lstStyle/>
           <a:p>
-            <a:fld id="{077D9A96-DC16-4E10-8D65-6D50E4BCA319}" type="slidenum">
+            <a:fld id="{37063EAF-9990-4D4F-83A8-EEDC7F3A64BB}" type="slidenum">
               <a:rPr lang="en-US"/>
               <a:t>‹#›</a:t>
             </a:fld>
@@ -6566,7 +6566,7 @@
           <a:bodyPr/>
           <a:lstStyle/>
           <a:p>
-            <a:fld id="{1D7B2AEC-41B8-4168-9801-B461E0AC9835}" type="slidenum">
+            <a:fld id="{97C285FC-E14C-4AD7-9686-3753D1C9E5AA}" type="slidenum">
               <a:rPr lang="en-US"/>
               <a:t>‹#›</a:t>
             </a:fld>
@@ -7926,7 +7926,7 @@
           <a:bodyPr/>
           <a:lstStyle/>
           <a:p>
-            <a:fld id="{BB38D41A-6486-49AB-B231-7345E37AC837}" type="slidenum">
+            <a:fld id="{84BE2E0A-E498-4242-9281-123CCECF600F}" type="slidenum">
               <a:rPr lang="en-US"/>
               <a:t>‹#›</a:t>
             </a:fld>
@@ -8014,7 +8014,7 @@
           <a:bodyPr/>
           <a:lstStyle/>
           <a:p>
-            <a:fld id="{0425F135-4E9C-46C3-8255-629DC6693E5C}" type="slidenum">
+            <a:fld id="{5502A276-E0BE-4515-A985-3DAFBCE88C76}" type="slidenum">
               <a:rPr lang="en-US"/>
               <a:t>‹#›</a:t>
             </a:fld>
